--- a/share/public-opportunity-scan/samples/kraft-heinz/kraft-heinz-deck.pptx
+++ b/share/public-opportunity-scan/samples/kraft-heinz/kraft-heinz-deck.pptx
@@ -7743,7 +7743,7 @@
                     <a:srgbClr val="000000"/>
                   </a:solidFill>
                 </a:rPr>
-                <a:t>EBIT bridge to FY28 (USDM)</a:t>
+                <a:t>EBIT bridge to FY28 (USD millions)</a:t>
               </a:r>
             </a:p>
           </p:txBody>
